--- a/Topic_D/Exam_Practice/TD-L02_Writing_Workshop_The_Classroom_and_Learning_Tools.pptx
+++ b/Topic_D/Exam_Practice/TD-L02_Writing_Workshop_The_Classroom_and_Learning_Tools.pptx
@@ -784,7 +784,11 @@
           <a:lstStyle/>
           <a:p>
             <a:r>
-              <a:rPr lang="en-US" dirty="0"/>
+              <a:rPr lang="ar-SA" dirty="0">
+                <a:latin typeface="Amiri" pitchFamily="2" charset="-78"/>
+                <a:ea typeface="Amiri" pitchFamily="2" charset="-78"/>
+                <a:cs typeface="Amiri" pitchFamily="2" charset="-78"/>
+              </a:rPr>
               <a:t>Q3 (3 min to choose and read). Title (أ) suits Core and Develop; title (ب) suits Stretch.</a:t>
             </a:r>
             <a:endParaRPr lang="en-US" dirty="0"/>
@@ -1403,7 +1407,11 @@
           <a:lstStyle/>
           <a:p>
             <a:r>
-              <a:rPr lang="en-US" dirty="0"/>
+              <a:rPr lang="ar-SA" dirty="0">
+                <a:latin typeface="Amiri" pitchFamily="2" charset="-78"/>
+                <a:ea typeface="Amiri" pitchFamily="2" charset="-78"/>
+                <a:cs typeface="Amiri" pitchFamily="2" charset="-78"/>
+              </a:rPr>
               <a:t>WELCOME (1 min) — while students join.
 • Greet each student by name as they arrive: السَّلَامُ عَلَيْكُمْ. Take the register (Pastoral Tracker: attendance 0/1).
 • 2-MINUTE CHECK-IN (SEND training): a private chat to any student who seemed unsettled last lesson — “Are you okay today? 👍 / 👎”.
@@ -1936,7 +1944,11 @@
           <a:lstStyle/>
           <a:p>
             <a:r>
-              <a:rPr lang="en-US" dirty="0"/>
+              <a:rPr lang="ar-SA" dirty="0">
+                <a:latin typeface="Amiri" pitchFamily="2" charset="-78"/>
+                <a:ea typeface="Amiri" pitchFamily="2" charset="-78"/>
+                <a:cs typeface="Amiri" pitchFamily="2" charset="-78"/>
+              </a:rPr>
               <a:t>Question words: كَيْفَ (what … like) · مَاذَا يُوجَدُ (what is there) · اسْتَخْدَمْتِ (you used — PAST) · سَتَفْعَلُونَ (you will do — FUTURE).</a:t>
             </a:r>
             <a:endParaRPr lang="en-US" dirty="0"/>
@@ -2508,6 +2520,7 @@
                   <a:srgbClr val="D4AF37"/>
                 </a:solidFill>
                 <a:latin typeface="Amiri" pitchFamily="2" charset="-78"/>
+                <a:ea typeface="Amiri" pitchFamily="2" charset="-78"/>
                 <a:cs typeface="Amiri" pitchFamily="2" charset="-78"/>
               </a:rPr>
               <a:t>م</a:t>
@@ -2714,6 +2727,7 @@
                   <a:srgbClr val="D4AF37"/>
                 </a:solidFill>
                 <a:latin typeface="Amiri" pitchFamily="2" charset="-78"/>
+                <a:ea typeface="Amiri" pitchFamily="2" charset="-78"/>
                 <a:cs typeface="Amiri" pitchFamily="2" charset="-78"/>
               </a:rPr>
               <a:t>وَرْشَةُ الكِتَابَةِ — الفَصْلُ وَأَدَوَاتُ التَّعَلُّمِ</a:t>
@@ -3171,6 +3185,7 @@
                   <a:srgbClr val="D4AF37"/>
                 </a:solidFill>
                 <a:latin typeface="Amiri" pitchFamily="2" charset="-78"/>
+                <a:ea typeface="Amiri" pitchFamily="2" charset="-78"/>
                 <a:cs typeface="Amiri" pitchFamily="2" charset="-78"/>
               </a:rPr>
               <a:t>م</a:t>
@@ -3491,6 +3506,7 @@
                   <a:srgbClr val="8A6D1E"/>
                 </a:solidFill>
                 <a:latin typeface="Amiri" pitchFamily="2" charset="-78"/>
+                <a:ea typeface="Amiri" pitchFamily="2" charset="-78"/>
                 <a:cs typeface="Amiri" pitchFamily="2" charset="-78"/>
               </a:rPr>
               <a:t>نَمُوذَجُ الإِجَابَةِ</a:t>
@@ -3604,6 +3620,7 @@
                   <a:srgbClr val="1F2A37"/>
                 </a:solidFill>
                 <a:latin typeface="Amiri" pitchFamily="2" charset="-78"/>
+                <a:ea typeface="Amiri" pitchFamily="2" charset="-78"/>
                 <a:cs typeface="Amiri" pitchFamily="2" charset="-78"/>
               </a:rPr>
               <a:t>مَرْحَبًا يَا رِيمُ،</a:t>
@@ -3623,6 +3640,7 @@
                   <a:srgbClr val="1F2A37"/>
                 </a:solidFill>
                 <a:latin typeface="Amiri" pitchFamily="2" charset="-78"/>
+                <a:ea typeface="Amiri" pitchFamily="2" charset="-78"/>
                 <a:cs typeface="Amiri" pitchFamily="2" charset="-78"/>
               </a:rPr>
               <a:t>كَيْفَ حَالُكِ؟ أُرِيدُ أَنْ أَصِفَ لَكِ فَصْلِي الجَدِيدَ. هُوَ فَصْلٌ كَبِيرٌ وَمُضِيءٌ فِي الطَّابِقِ الثَّانِي. فِيهِ تُوجَدُ سَبُّورَةٌ ذَكِيَّةٌ، وَيُوجَدُ حَاسُوبٌ لِكُلِّ طَالِبَيْنِ. عَلَى الجُدْرَانِ خَرَائِطُ وَصُوَرٌ جَمِيلَةٌ. أَمْسِ اسْتَخْدَمْنَا الحَوَاسِيبَ اللَّوْحِيَّةَ فِي حِصَّةِ الجُغْرَافْيَا، وَكَانَ الدَّرْسُ مُمْتِعًا جِدًّا. فِي فَصْلِنَا قَوَاعِدُ: الهَوَاتِفُ مَمْنُوعَةٌ، وَيَجِبُ أَنْ نَرْفَعَ أَيْدِيَنَا. فِي رَأْيِي، هٰذَا الفَصْلُ أَفْضَلُ مِنْ فَصْلِي القَدِيمِ. فِي الأُسْبُوعِ القَادِمِ سَنَزْرَعُ نَبَاتَاتٍ صَغِيرَةً عِنْدَ النَّافِذَةِ.</a:t>
@@ -3642,6 +3660,7 @@
                   <a:srgbClr val="1F2A37"/>
                 </a:solidFill>
                 <a:latin typeface="Amiri" pitchFamily="2" charset="-78"/>
+                <a:ea typeface="Amiri" pitchFamily="2" charset="-78"/>
                 <a:cs typeface="Amiri" pitchFamily="2" charset="-78"/>
               </a:rPr>
               <a:t>مَعَ السَّلَامَةِ،</a:t>
@@ -3661,6 +3680,7 @@
                   <a:srgbClr val="1F2A37"/>
                 </a:solidFill>
                 <a:latin typeface="Amiri" pitchFamily="2" charset="-78"/>
+                <a:ea typeface="Amiri" pitchFamily="2" charset="-78"/>
                 <a:cs typeface="Amiri" pitchFamily="2" charset="-78"/>
               </a:rPr>
               <a:t>نُورَةُ</a:t>
@@ -3824,11 +3844,12 @@
               <a:buNone/>
             </a:pPr>
             <a:r>
-              <a:rPr lang="en-US" sz="950" b="1" dirty="0">
+              <a:rPr lang="ar-SA" sz="950" b="1" dirty="0">
                 <a:solidFill>
                   <a:srgbClr val="FFFFFF"/>
                 </a:solidFill>
                 <a:latin typeface="Calibri" pitchFamily="34" charset="0"/>
+                <a:ea typeface="Amiri" pitchFamily="2" charset="-78"/>
                 <a:cs typeface="Amiri" pitchFamily="2" charset="-78"/>
               </a:rPr>
               <a:t>تُوجَدُ سَبُّورَةٌ ذَكِيَّةٌ</a:t>
@@ -3889,11 +3910,12 @@
               <a:buNone/>
             </a:pPr>
             <a:r>
-              <a:rPr lang="en-US" sz="950" b="1" dirty="0">
+              <a:rPr lang="ar-SA" sz="950" b="1" dirty="0">
                 <a:solidFill>
                   <a:srgbClr val="FFFFFF"/>
                 </a:solidFill>
                 <a:latin typeface="Calibri" pitchFamily="34" charset="0"/>
+                <a:ea typeface="Amiri" pitchFamily="2" charset="-78"/>
                 <a:cs typeface="Amiri" pitchFamily="2" charset="-78"/>
               </a:rPr>
               <a:t>اسْتَخْدَمْنَا الحَوَاسِيبَ</a:t>
@@ -3954,11 +3976,12 @@
               <a:buNone/>
             </a:pPr>
             <a:r>
-              <a:rPr lang="en-US" sz="950" b="1" dirty="0">
+              <a:rPr lang="ar-SA" sz="950" b="1" dirty="0">
                 <a:solidFill>
                   <a:srgbClr val="FFFFFF"/>
                 </a:solidFill>
                 <a:latin typeface="Calibri" pitchFamily="34" charset="0"/>
+                <a:ea typeface="Amiri" pitchFamily="2" charset="-78"/>
                 <a:cs typeface="Amiri" pitchFamily="2" charset="-78"/>
               </a:rPr>
               <a:t>الهَوَاتِفُ مَمْنُوعَةٌ</a:t>
@@ -4019,11 +4042,12 @@
               <a:buNone/>
             </a:pPr>
             <a:r>
-              <a:rPr lang="en-US" sz="950" b="1" dirty="0">
+              <a:rPr lang="ar-SA" sz="950" b="1" dirty="0">
                 <a:solidFill>
                   <a:srgbClr val="FFFFFF"/>
                 </a:solidFill>
                 <a:latin typeface="Calibri" pitchFamily="34" charset="0"/>
+                <a:ea typeface="Amiri" pitchFamily="2" charset="-78"/>
                 <a:cs typeface="Amiri" pitchFamily="2" charset="-78"/>
               </a:rPr>
               <a:t>هٰذَا الفَصْلُ أَفْضَلُ</a:t>
@@ -4157,6 +4181,7 @@
                   <a:srgbClr val="D4AF37"/>
                 </a:solidFill>
                 <a:latin typeface="Amiri" pitchFamily="2" charset="-78"/>
+                <a:ea typeface="Amiri" pitchFamily="2" charset="-78"/>
                 <a:cs typeface="Amiri" pitchFamily="2" charset="-78"/>
               </a:rPr>
               <a:t>م</a:t>
@@ -4477,6 +4502,7 @@
                   <a:srgbClr val="8A6D1E"/>
                 </a:solidFill>
                 <a:latin typeface="Amiri" pitchFamily="2" charset="-78"/>
+                <a:ea typeface="Amiri" pitchFamily="2" charset="-78"/>
                 <a:cs typeface="Amiri" pitchFamily="2" charset="-78"/>
               </a:rPr>
               <a:t>نَمُوذَجُ الإِجَابَةِ</a:t>
@@ -4590,6 +4616,7 @@
                   <a:srgbClr val="1F2A37"/>
                 </a:solidFill>
                 <a:latin typeface="Amiri" pitchFamily="2" charset="-78"/>
+                <a:ea typeface="Amiri" pitchFamily="2" charset="-78"/>
                 <a:cs typeface="Amiri" pitchFamily="2" charset="-78"/>
               </a:rPr>
               <a:t>عَزِيزَتِي رِيمُ،</a:t>
@@ -4609,6 +4636,7 @@
                   <a:srgbClr val="1F2A37"/>
                 </a:solidFill>
                 <a:latin typeface="Amiri" pitchFamily="2" charset="-78"/>
+                <a:ea typeface="Amiri" pitchFamily="2" charset="-78"/>
                 <a:cs typeface="Amiri" pitchFamily="2" charset="-78"/>
               </a:rPr>
               <a:t>وَعَدْتُكِ أَنْ أَصِفَ لَكِ فَصْلِي الجَدِيدَ، وَهَا أَنَا أَفِي بِوَعْدِي! إِنَّهُ فَصْلٌ وَاسِعٌ تُطِلُّ نَوَافِذُهُ عَلَى الحَدِيقَةِ، تُوجَدُ فِيهِ سَبُّورَةٌ ذَكِيَّةٌ يَعْرِضُ عَلَيْهَا المُعَلِّمُ الأَفْلَامَ وَالخَرَائِطَ، وَطَاوِلَاتٌ دَائِرِيَّةٌ نَجْلِسُ حَوْلَهَا فِي مَجْمُوعَاتٍ. وَأَكْثَرُ مَا أَعْجَبَنِي الحَوَاسِيبُ اللَّوْحِيَّةُ الَّتِي اسْتَخْدَمْنَاهَا أَمْسِ لِتَصْمِيمِ خَرِيطَةٍ تَفَاعُلِيَّةٍ لِمَدِينَتِنَا. صَحِيحٌ أَنَّ القَوَاعِدَ هُنَا صَارِمَةٌ، فَالهَوَاتِفُ مَمْنُوعَةٌ تَمَامًا، غَيْرَ أَنَّنِي أَشْعُرُ بِتَرْكِيزٍ أَكْبَرَ مِنْ قَبْلُ. وَإِذَا وَافَقَتِ المُعَلِّمَةُ عَلَى اقْتِرَاحِي، فَسَنُنْشِئُ رُكْنًا صَغِيرًا لِلْقِرَاءَةِ فِي آخِرِ الفَصْلِ، فِيهِ وَسَائِدُ مُلَوَّنَةٌ وَكُتُبٌ عَرَبِيَّةٌ.</a:t>
@@ -4628,6 +4656,7 @@
                   <a:srgbClr val="1F2A37"/>
                 </a:solidFill>
                 <a:latin typeface="Amiri" pitchFamily="2" charset="-78"/>
+                <a:ea typeface="Amiri" pitchFamily="2" charset="-78"/>
                 <a:cs typeface="Amiri" pitchFamily="2" charset="-78"/>
               </a:rPr>
               <a:t>بِمَحَبَّةٍ،</a:t>
@@ -4647,6 +4676,7 @@
                   <a:srgbClr val="1F2A37"/>
                 </a:solidFill>
                 <a:latin typeface="Amiri" pitchFamily="2" charset="-78"/>
+                <a:ea typeface="Amiri" pitchFamily="2" charset="-78"/>
                 <a:cs typeface="Amiri" pitchFamily="2" charset="-78"/>
               </a:rPr>
               <a:t>نُورَةُ</a:t>
@@ -4810,11 +4840,12 @@
               <a:buNone/>
             </a:pPr>
             <a:r>
-              <a:rPr lang="en-US" sz="950" b="1" dirty="0">
+              <a:rPr lang="ar-SA" sz="950" b="1" dirty="0">
                 <a:solidFill>
                   <a:srgbClr val="FFFFFF"/>
                 </a:solidFill>
                 <a:latin typeface="Calibri" pitchFamily="34" charset="0"/>
+                <a:ea typeface="Amiri" pitchFamily="2" charset="-78"/>
                 <a:cs typeface="Amiri" pitchFamily="2" charset="-78"/>
               </a:rPr>
               <a:t>تُطِلُّ نَوَافِذُهُ</a:t>
@@ -4875,11 +4906,12 @@
               <a:buNone/>
             </a:pPr>
             <a:r>
-              <a:rPr lang="en-US" sz="950" b="1" dirty="0">
+              <a:rPr lang="ar-SA" sz="950" b="1" dirty="0">
                 <a:solidFill>
                   <a:srgbClr val="FFFFFF"/>
                 </a:solidFill>
                 <a:latin typeface="Calibri" pitchFamily="34" charset="0"/>
+                <a:ea typeface="Amiri" pitchFamily="2" charset="-78"/>
                 <a:cs typeface="Amiri" pitchFamily="2" charset="-78"/>
               </a:rPr>
               <a:t>يَعْرِضُ عَلَيْهَا</a:t>
@@ -4940,11 +4972,12 @@
               <a:buNone/>
             </a:pPr>
             <a:r>
-              <a:rPr lang="en-US" sz="950" b="1" dirty="0">
+              <a:rPr lang="ar-SA" sz="950" b="1" dirty="0">
                 <a:solidFill>
                   <a:srgbClr val="FFFFFF"/>
                 </a:solidFill>
                 <a:latin typeface="Calibri" pitchFamily="34" charset="0"/>
+                <a:ea typeface="Amiri" pitchFamily="2" charset="-78"/>
                 <a:cs typeface="Amiri" pitchFamily="2" charset="-78"/>
               </a:rPr>
               <a:t>الَّتِي اسْتَخْدَمْنَاهَا</a:t>
@@ -5005,11 +5038,12 @@
               <a:buNone/>
             </a:pPr>
             <a:r>
-              <a:rPr lang="en-US" sz="950" b="1" dirty="0">
+              <a:rPr lang="ar-SA" sz="950" b="1" dirty="0">
                 <a:solidFill>
                   <a:srgbClr val="FFFFFF"/>
                 </a:solidFill>
                 <a:latin typeface="Calibri" pitchFamily="34" charset="0"/>
+                <a:ea typeface="Amiri" pitchFamily="2" charset="-78"/>
                 <a:cs typeface="Amiri" pitchFamily="2" charset="-78"/>
               </a:rPr>
               <a:t>إِذَا وَافَقَتْ … فَسَنُنْشِئُ</a:t>
@@ -5143,6 +5177,7 @@
                   <a:srgbClr val="D4AF37"/>
                 </a:solidFill>
                 <a:latin typeface="Amiri" pitchFamily="2" charset="-78"/>
+                <a:ea typeface="Amiri" pitchFamily="2" charset="-78"/>
                 <a:cs typeface="Amiri" pitchFamily="2" charset="-78"/>
               </a:rPr>
               <a:t>م</a:t>
@@ -5463,6 +5498,7 @@
                   <a:srgbClr val="8A6D1E"/>
                 </a:solidFill>
                 <a:latin typeface="Amiri" pitchFamily="2" charset="-78"/>
+                <a:ea typeface="Amiri" pitchFamily="2" charset="-78"/>
                 <a:cs typeface="Amiri" pitchFamily="2" charset="-78"/>
               </a:rPr>
               <a:t>اخْتَرْ عُنْوَانًا وَاحِدًا</a:t>
@@ -5743,6 +5779,7 @@
                   <a:srgbClr val="1B3B6F"/>
                 </a:solidFill>
                 <a:latin typeface="Amiri" pitchFamily="2" charset="-78"/>
+                <a:ea typeface="Amiri" pitchFamily="2" charset="-78"/>
                 <a:cs typeface="Amiri" pitchFamily="2" charset="-78"/>
               </a:rPr>
               <a:t>فَصْلِي وَأَدَوَاتُ التَّعَلُّمِ</a:t>
@@ -5781,6 +5818,7 @@
                   <a:srgbClr val="1B3B6F"/>
                 </a:solidFill>
                 <a:latin typeface="Amiri" pitchFamily="2" charset="-78"/>
+                <a:ea typeface="Amiri" pitchFamily="2" charset="-78"/>
                 <a:cs typeface="Amiri" pitchFamily="2" charset="-78"/>
               </a:rPr>
               <a:t>(أ)</a:t>
@@ -5884,6 +5922,7 @@
                   <a:srgbClr val="1B3B6F"/>
                 </a:solidFill>
                 <a:latin typeface="Amiri" pitchFamily="2" charset="-78"/>
+                <a:ea typeface="Amiri" pitchFamily="2" charset="-78"/>
                 <a:cs typeface="Amiri" pitchFamily="2" charset="-78"/>
               </a:rPr>
               <a:t>وَصْفُ فَصْلِكَ · الأَدَوَاتُ الَّتِي تَسْتَخْدِمُهَا · فَصْلُكَ فِي المَاضِي · رَأْيُكَ وَخِطَطُكَ</a:t>
@@ -6015,6 +6054,7 @@
                   <a:srgbClr val="1B3B6F"/>
                 </a:solidFill>
                 <a:latin typeface="Amiri" pitchFamily="2" charset="-78"/>
+                <a:ea typeface="Amiri" pitchFamily="2" charset="-78"/>
                 <a:cs typeface="Amiri" pitchFamily="2" charset="-78"/>
               </a:rPr>
               <a:t>هَلْ تُحَسِّنُ الأَجْهِزَةُ التَّعَلُّمَ؟</a:t>
@@ -6053,6 +6093,7 @@
                   <a:srgbClr val="1B3B6F"/>
                 </a:solidFill>
                 <a:latin typeface="Amiri" pitchFamily="2" charset="-78"/>
+                <a:ea typeface="Amiri" pitchFamily="2" charset="-78"/>
                 <a:cs typeface="Amiri" pitchFamily="2" charset="-78"/>
               </a:rPr>
               <a:t>(ب)</a:t>
@@ -6156,6 +6197,7 @@
                   <a:srgbClr val="1B3B6F"/>
                 </a:solidFill>
                 <a:latin typeface="Amiri" pitchFamily="2" charset="-78"/>
+                <a:ea typeface="Amiri" pitchFamily="2" charset="-78"/>
                 <a:cs typeface="Amiri" pitchFamily="2" charset="-78"/>
               </a:rPr>
               <a:t>التِّكْنُولُوجْيَا فِي الفُصُولِ · الإِيجَابِيَّاتُ وَالسَّلْبِيَّاتُ · تَجْرِبَتُكَ · رَأْيُكَ</a:t>
@@ -6355,6 +6397,7 @@
                   <a:srgbClr val="D4AF37"/>
                 </a:solidFill>
                 <a:latin typeface="Amiri" pitchFamily="2" charset="-78"/>
+                <a:ea typeface="Amiri" pitchFamily="2" charset="-78"/>
                 <a:cs typeface="Amiri" pitchFamily="2" charset="-78"/>
               </a:rPr>
               <a:t>م</a:t>
@@ -6675,6 +6718,7 @@
                   <a:srgbClr val="8A6D1E"/>
                 </a:solidFill>
                 <a:latin typeface="Amiri" pitchFamily="2" charset="-78"/>
+                <a:ea typeface="Amiri" pitchFamily="2" charset="-78"/>
                 <a:cs typeface="Amiri" pitchFamily="2" charset="-78"/>
               </a:rPr>
               <a:t>خُطَّةُ الكِتَابَةِ</a:t>
@@ -7299,6 +7343,7 @@
                   <a:srgbClr val="1B3B6F"/>
                 </a:solidFill>
                 <a:latin typeface="Amiri" pitchFamily="2" charset="-78"/>
+                <a:ea typeface="Amiri" pitchFamily="2" charset="-78"/>
                 <a:cs typeface="Amiri" pitchFamily="2" charset="-78"/>
               </a:rPr>
               <a:t>فِي فَصْلِي تُوجَدُ سَبُّورَةٌ ذَكِيَّةٌ، وَيُوجَدُ ثَلَاثُونَ مَقْعَدًا.</a:t>
@@ -7398,6 +7443,7 @@
                   <a:srgbClr val="1B3B6F"/>
                 </a:solidFill>
                 <a:latin typeface="Amiri" pitchFamily="2" charset="-78"/>
+                <a:ea typeface="Amiri" pitchFamily="2" charset="-78"/>
                 <a:cs typeface="Amiri" pitchFamily="2" charset="-78"/>
               </a:rPr>
               <a:t>لَمْ تَكُنْ هُنَاكَ حَوَاسِيبُ، وَكُنَّا نَكْتُبُ فِي الدَّفَاتِرِ.</a:t>
@@ -7497,6 +7543,7 @@
                   <a:srgbClr val="1B3B6F"/>
                 </a:solidFill>
                 <a:latin typeface="Amiri" pitchFamily="2" charset="-78"/>
+                <a:ea typeface="Amiri" pitchFamily="2" charset="-78"/>
                 <a:cs typeface="Amiri" pitchFamily="2" charset="-78"/>
               </a:rPr>
               <a:t>سَأَشْتَرِي حَاسُوبًا لَوْحِيًّا جَدِيدًا.</a:t>
@@ -7658,6 +7705,7 @@
                   <a:srgbClr val="1F2A37"/>
                 </a:solidFill>
                 <a:latin typeface="Amiri" pitchFamily="2" charset="-78"/>
+                <a:ea typeface="Amiri" pitchFamily="2" charset="-78"/>
                 <a:cs typeface="Amiri" pitchFamily="2" charset="-78"/>
               </a:rPr>
               <a:t>أ</a:t>
@@ -7684,6 +7732,7 @@
                   <a:srgbClr val="1F2A37"/>
                 </a:solidFill>
                 <a:latin typeface="Amiri" pitchFamily="2" charset="-78"/>
+                <a:ea typeface="Amiri" pitchFamily="2" charset="-78"/>
                 <a:cs typeface="Amiri" pitchFamily="2" charset="-78"/>
               </a:rPr>
               <a:t>ب</a:t>
@@ -7830,6 +7879,7 @@
                   <a:srgbClr val="D4AF37"/>
                 </a:solidFill>
                 <a:latin typeface="Amiri" pitchFamily="2" charset="-78"/>
+                <a:ea typeface="Amiri" pitchFamily="2" charset="-78"/>
                 <a:cs typeface="Amiri" pitchFamily="2" charset="-78"/>
               </a:rPr>
               <a:t>م</a:t>
@@ -8087,6 +8137,7 @@
                   <a:srgbClr val="8A6D1E"/>
                 </a:solidFill>
                 <a:latin typeface="Amiri" pitchFamily="2" charset="-78"/>
+                <a:ea typeface="Amiri" pitchFamily="2" charset="-78"/>
                 <a:cs typeface="Amiri" pitchFamily="2" charset="-78"/>
               </a:rPr>
               <a:t>أ</a:t>
@@ -8151,6 +8202,7 @@
                   <a:srgbClr val="1B3B6F"/>
                 </a:solidFill>
                 <a:latin typeface="Amiri" pitchFamily="2" charset="-78"/>
+                <a:ea typeface="Amiri" pitchFamily="2" charset="-78"/>
                 <a:cs typeface="Amiri" pitchFamily="2" charset="-78"/>
               </a:rPr>
               <a:t>أ</a:t>
@@ -8202,6 +8254,7 @@
                   <a:srgbClr val="8A6D1E"/>
                 </a:solidFill>
                 <a:latin typeface="Amiri" pitchFamily="2" charset="-78"/>
+                <a:ea typeface="Amiri" pitchFamily="2" charset="-78"/>
                 <a:cs typeface="Amiri" pitchFamily="2" charset="-78"/>
               </a:rPr>
               <a:t>نَمُوذَجُ الإِجَابَةِ</a:t>
@@ -8315,6 +8368,7 @@
                   <a:srgbClr val="1F2A37"/>
                 </a:solidFill>
                 <a:latin typeface="Amiri" pitchFamily="2" charset="-78"/>
+                <a:ea typeface="Amiri" pitchFamily="2" charset="-78"/>
                 <a:cs typeface="Amiri" pitchFamily="2" charset="-78"/>
               </a:rPr>
               <a:t>أَدْرُسُ فِي فَصْلٍ كَبِيرٍ فِي الطَّابِقِ الأَوَّلِ. فِي فَصْلِي تُوجَدُ سَبُّورَةٌ ذَكِيَّةٌ، وَيُوجَدُ ثَلَاثُونَ مَقْعَدًا، وَنَوَافِذُ كَبِيرَةٌ تُطِلُّ عَلَى المَلْعَبِ. عَلَى الجُدْرَانِ صُوَرٌ وَخَرَائِطُ مُلَوَّنَةٌ. أُحِبُّ فَصْلِي، لِأَنَّهُ مُضِيءٌ وَهَادِئٌ، وَلِأَنَّ أَصْدِقَائِي يَجْلِسُونَ بِجَانِبِي.</a:t>
@@ -8334,6 +8388,7 @@
                   <a:srgbClr val="1F2A37"/>
                 </a:solidFill>
                 <a:latin typeface="Amiri" pitchFamily="2" charset="-78"/>
+                <a:ea typeface="Amiri" pitchFamily="2" charset="-78"/>
                 <a:cs typeface="Amiri" pitchFamily="2" charset="-78"/>
               </a:rPr>
               <a:t>أَسْتَخْدِمُ أَدَوَاتٍ كَثِيرَةً لِلدِّرَاسَةِ. فِي حَقِيبَتِي كُتُبٌ وَدَفَاتِرُ وَأَقْلَامٌ. أَسْتَخْدِمُ أَيْضًا الحَاسُوبَ الَّذِي أَعْطَتْنِي إِيَّاهُ المَدْرَسَةُ، لِلْبَحْثِ وَالوَاجِبَاتِ. هٰذَا الحَاسُوبُ مُفِيدٌ جِدًّا، لِأَنَّهُ خَفِيفٌ وَسَرِيعٌ.</a:t>
@@ -8353,6 +8408,7 @@
                   <a:srgbClr val="1F2A37"/>
                 </a:solidFill>
                 <a:latin typeface="Amiri" pitchFamily="2" charset="-78"/>
+                <a:ea typeface="Amiri" pitchFamily="2" charset="-78"/>
                 <a:cs typeface="Amiri" pitchFamily="2" charset="-78"/>
               </a:rPr>
               <a:t>فِي المَدْرَسَةِ الابْتِدَائِيَّةِ كَانَ فَصْلِي صَغِيرًا وَمُلَوَّنًا. لَمْ تَكُنْ هُنَاكَ حَوَاسِيبُ، وَكُنَّا نَكْتُبُ كُلَّ شَيْءٍ فِي الدَّفَاتِرِ. كَانَتْ مُعَلِّمَتِي تَقْرَأُ لَنَا قِصَصًا جَمِيلَةً كُلَّ يَوْمٍ، وَكُنْتُ أَنْتَظِرُ ذٰلِكَ الوَقْتَ بِشَوْقٍ.</a:t>
@@ -8372,6 +8428,7 @@
                   <a:srgbClr val="1F2A37"/>
                 </a:solidFill>
                 <a:latin typeface="Amiri" pitchFamily="2" charset="-78"/>
+                <a:ea typeface="Amiri" pitchFamily="2" charset="-78"/>
                 <a:cs typeface="Amiri" pitchFamily="2" charset="-78"/>
               </a:rPr>
               <a:t>فِي رَأْيِي، التِّكْنُولُوجْيَا مُفِيدَةٌ فِي الفَصْلِ، لٰكِنَّ الكُتُبَ مُهِمَّةٌ أَيْضًا. فِي المُسْتَقْبَلِ سَأَشْتَرِي حَاسُوبًا لَوْحِيًّا جَدِيدًا، وَسَأَسْتَخْدِمُهُ لِتَعَلُّمِ اللُّغَةِ العَرَبِيَّةِ فِي البَيْتِ.</a:t>
@@ -8535,11 +8592,12 @@
               <a:buNone/>
             </a:pPr>
             <a:r>
-              <a:rPr lang="en-US" sz="950" b="1" dirty="0">
+              <a:rPr lang="ar-SA" sz="950" b="1" dirty="0">
                 <a:solidFill>
                   <a:srgbClr val="FFFFFF"/>
                 </a:solidFill>
                 <a:latin typeface="Calibri" pitchFamily="34" charset="0"/>
+                <a:ea typeface="Amiri" pitchFamily="2" charset="-78"/>
                 <a:cs typeface="Amiri" pitchFamily="2" charset="-78"/>
               </a:rPr>
               <a:t>تُوجَدُ سَبُّورَةٌ ذَكِيَّةٌ</a:t>
@@ -8600,11 +8658,12 @@
               <a:buNone/>
             </a:pPr>
             <a:r>
-              <a:rPr lang="en-US" sz="950" b="1" dirty="0">
+              <a:rPr lang="ar-SA" sz="950" b="1" dirty="0">
                 <a:solidFill>
                   <a:srgbClr val="FFFFFF"/>
                 </a:solidFill>
                 <a:latin typeface="Calibri" pitchFamily="34" charset="0"/>
+                <a:ea typeface="Amiri" pitchFamily="2" charset="-78"/>
                 <a:cs typeface="Amiri" pitchFamily="2" charset="-78"/>
               </a:rPr>
               <a:t>الحَاسُوبَ الَّذِي</a:t>
@@ -8665,11 +8724,12 @@
               <a:buNone/>
             </a:pPr>
             <a:r>
-              <a:rPr lang="en-US" sz="950" b="1" dirty="0">
+              <a:rPr lang="ar-SA" sz="950" b="1" dirty="0">
                 <a:solidFill>
                   <a:srgbClr val="FFFFFF"/>
                 </a:solidFill>
                 <a:latin typeface="Calibri" pitchFamily="34" charset="0"/>
+                <a:ea typeface="Amiri" pitchFamily="2" charset="-78"/>
                 <a:cs typeface="Amiri" pitchFamily="2" charset="-78"/>
               </a:rPr>
               <a:t>لَمْ تَكُنْ هُنَاكَ</a:t>
@@ -8730,11 +8790,12 @@
               <a:buNone/>
             </a:pPr>
             <a:r>
-              <a:rPr lang="en-US" sz="950" b="1" dirty="0">
+              <a:rPr lang="ar-SA" sz="950" b="1" dirty="0">
                 <a:solidFill>
                   <a:srgbClr val="FFFFFF"/>
                 </a:solidFill>
                 <a:latin typeface="Calibri" pitchFamily="34" charset="0"/>
+                <a:ea typeface="Amiri" pitchFamily="2" charset="-78"/>
                 <a:cs typeface="Amiri" pitchFamily="2" charset="-78"/>
               </a:rPr>
               <a:t>سَأَشْتَرِي حَاسُوبًا</a:t>
@@ -8868,6 +8929,7 @@
                   <a:srgbClr val="D4AF37"/>
                 </a:solidFill>
                 <a:latin typeface="Amiri" pitchFamily="2" charset="-78"/>
+                <a:ea typeface="Amiri" pitchFamily="2" charset="-78"/>
                 <a:cs typeface="Amiri" pitchFamily="2" charset="-78"/>
               </a:rPr>
               <a:t>م</a:t>
@@ -9125,6 +9187,7 @@
                   <a:srgbClr val="8A6D1E"/>
                 </a:solidFill>
                 <a:latin typeface="Amiri" pitchFamily="2" charset="-78"/>
+                <a:ea typeface="Amiri" pitchFamily="2" charset="-78"/>
                 <a:cs typeface="Amiri" pitchFamily="2" charset="-78"/>
               </a:rPr>
               <a:t>أ</a:t>
@@ -9189,6 +9252,7 @@
                   <a:srgbClr val="1B3B6F"/>
                 </a:solidFill>
                 <a:latin typeface="Amiri" pitchFamily="2" charset="-78"/>
+                <a:ea typeface="Amiri" pitchFamily="2" charset="-78"/>
                 <a:cs typeface="Amiri" pitchFamily="2" charset="-78"/>
               </a:rPr>
               <a:t>أ</a:t>
@@ -9240,6 +9304,7 @@
                   <a:srgbClr val="8A6D1E"/>
                 </a:solidFill>
                 <a:latin typeface="Amiri" pitchFamily="2" charset="-78"/>
+                <a:ea typeface="Amiri" pitchFamily="2" charset="-78"/>
                 <a:cs typeface="Amiri" pitchFamily="2" charset="-78"/>
               </a:rPr>
               <a:t>نَمُوذَجُ الإِجَابَةِ</a:t>
@@ -9353,6 +9418,7 @@
                   <a:srgbClr val="1F2A37"/>
                 </a:solidFill>
                 <a:latin typeface="Amiri" pitchFamily="2" charset="-78"/>
+                <a:ea typeface="Amiri" pitchFamily="2" charset="-78"/>
                 <a:cs typeface="Amiri" pitchFamily="2" charset="-78"/>
               </a:rPr>
               <a:t>لَمْ يَعُدِ الفَصْلُ الدِّرَاسِيُّ أَرْبَعَةَ جُدْرَانٍ وَسَبُّورَةً سَوْدَاءَ؛ فَفَصْلِي اليَوْمَ أَشْبَهُ بِمُخْتَبَرٍ صَغِيرٍ تُوجَدُ فِيهِ سَبُّورَةٌ ذَكِيَّةٌ، وَحَوَاسِيبُ لَوْحِيَّةٌ، وَطَاوِلَاتٌ دَائِرِيَّةٌ نَعْمَلُ حَوْلَهَا فِي مَجْمُوعَاتٍ، وَرُكْنٌ لِلْقِرَاءَةِ يَمْتَلِئُ بِالكُتُبِ وَالمَجَلَّاتِ.</a:t>
@@ -9372,6 +9438,7 @@
                   <a:srgbClr val="1F2A37"/>
                 </a:solidFill>
                 <a:latin typeface="Amiri" pitchFamily="2" charset="-78"/>
+                <a:ea typeface="Amiri" pitchFamily="2" charset="-78"/>
                 <a:cs typeface="Amiri" pitchFamily="2" charset="-78"/>
               </a:rPr>
               <a:t>وَلَعَلَّ أَهَمَّ أَدَاةٍ عِنْدِي هِيَ الحَاسُوبُ المَحْمُولُ الَّذِي أَحْضُرُ بِهِ دُرُوسِي، لِأَنَّنِي أَدْرُسُ بَعْضَ المَوَادِّ فِي مَدْرَسَةٍ إِلِكْتْرُونِيَّةٍ؛ فَعَلَيْهِ أُشَارِكُ فِي النِّقَاشِ، وَأُسَلِّمُ الوَاجِبَاتِ، وَأُرَاجِعُ التَّسْجِيلَاتِ الَّتِي يَرْفَعُهَا المُعَلِّمُونَ بَعْدَ كُلِّ حِصَّةٍ.</a:t>
@@ -9391,6 +9458,7 @@
                   <a:srgbClr val="1F2A37"/>
                 </a:solidFill>
                 <a:latin typeface="Amiri" pitchFamily="2" charset="-78"/>
+                <a:ea typeface="Amiri" pitchFamily="2" charset="-78"/>
                 <a:cs typeface="Amiri" pitchFamily="2" charset="-78"/>
               </a:rPr>
               <a:t>وَمَعَ ذٰلِكَ، أَتَذَكَّرُ بِحَنِينٍ فَصْلِي فِي المَدْرَسَةِ الابْتِدَائِيَّةِ؛ فَقَدْ كَانَتْ جُدْرَانُهُ مُغَطَّاةً بِرُسُومَاتِنَا، وَكَانَتِ المُعَلِّمَةُ تُوَزِّعُ عَلَيْنَا بِطَاقَاتٍ مُلَوَّنَةً نَصْنَعُ بِهَا القِصَصَ. لَمْ تَكُنْ هُنَاكَ شَاشَاتٌ، لٰكِنَّنَا تَعَلَّمْنَا الكَثِيرَ، لِأَنَّ الخَيَالَ كَانَ أَدَاتَنَا الأُولَى.</a:t>
@@ -9410,6 +9478,7 @@
                   <a:srgbClr val="1F2A37"/>
                 </a:solidFill>
                 <a:latin typeface="Amiri" pitchFamily="2" charset="-78"/>
+                <a:ea typeface="Amiri" pitchFamily="2" charset="-78"/>
                 <a:cs typeface="Amiri" pitchFamily="2" charset="-78"/>
               </a:rPr>
               <a:t>صَحِيحٌ أَنَّ التِّكْنُولُوجْيَا جَعَلَتِ التَّعَلُّمَ أَسْرَعَ وَأَمْتَعَ، غَيْرَ أَنَّ الأَدَاةَ وَحْدَهَا لَا تَصْنَعُ طَالِبًا نَاجِحًا. وَلَوْ جَمَعَتْ كُلُّ الفُصُولِ بَيْنَ الحَاسُوبِ وَالكِتَابِ وَالحِوَارِ، لَحَصَلْنَا عَلَى أَفْضَلِ مَا فِي العَالَمَيْنِ: سُرْعَةِ التِّكْنُولُوجْيَا، وَعُمْقِ القِرَاءَةِ، وَدِفْءِ النِّقَاشِ.</a:t>
@@ -9508,11 +9577,12 @@
               <a:buNone/>
             </a:pPr>
             <a:r>
-              <a:rPr lang="en-US" sz="950" b="1" dirty="0">
+              <a:rPr lang="ar-SA" sz="950" b="1" dirty="0">
                 <a:solidFill>
                   <a:srgbClr val="FFFFFF"/>
                 </a:solidFill>
                 <a:latin typeface="Calibri" pitchFamily="34" charset="0"/>
+                <a:ea typeface="Amiri" pitchFamily="2" charset="-78"/>
                 <a:cs typeface="Amiri" pitchFamily="2" charset="-78"/>
               </a:rPr>
               <a:t>لَمْ يَعُدِ</a:t>
@@ -9573,11 +9643,12 @@
               <a:buNone/>
             </a:pPr>
             <a:r>
-              <a:rPr lang="en-US" sz="950" b="1" dirty="0">
+              <a:rPr lang="ar-SA" sz="950" b="1" dirty="0">
                 <a:solidFill>
                   <a:srgbClr val="FFFFFF"/>
                 </a:solidFill>
                 <a:latin typeface="Calibri" pitchFamily="34" charset="0"/>
+                <a:ea typeface="Amiri" pitchFamily="2" charset="-78"/>
                 <a:cs typeface="Amiri" pitchFamily="2" charset="-78"/>
               </a:rPr>
               <a:t>الَّذِي أَحْضُرُ بِهِ</a:t>
@@ -9638,11 +9709,12 @@
               <a:buNone/>
             </a:pPr>
             <a:r>
-              <a:rPr lang="en-US" sz="950" b="1" dirty="0">
+              <a:rPr lang="ar-SA" sz="950" b="1" dirty="0">
                 <a:solidFill>
                   <a:srgbClr val="FFFFFF"/>
                 </a:solidFill>
                 <a:latin typeface="Calibri" pitchFamily="34" charset="0"/>
+                <a:ea typeface="Amiri" pitchFamily="2" charset="-78"/>
                 <a:cs typeface="Amiri" pitchFamily="2" charset="-78"/>
               </a:rPr>
               <a:t>الَّتِي يَرْفَعُهَا</a:t>
@@ -9703,11 +9775,12 @@
               <a:buNone/>
             </a:pPr>
             <a:r>
-              <a:rPr lang="en-US" sz="950" b="1" dirty="0">
+              <a:rPr lang="ar-SA" sz="950" b="1" dirty="0">
                 <a:solidFill>
                   <a:srgbClr val="FFFFFF"/>
                 </a:solidFill>
                 <a:latin typeface="Calibri" pitchFamily="34" charset="0"/>
+                <a:ea typeface="Amiri" pitchFamily="2" charset="-78"/>
                 <a:cs typeface="Amiri" pitchFamily="2" charset="-78"/>
               </a:rPr>
               <a:t>لَوْ جَمَعَتْ … لَحَصَلْنَا</a:t>
@@ -9841,6 +9914,7 @@
                   <a:srgbClr val="D4AF37"/>
                 </a:solidFill>
                 <a:latin typeface="Amiri" pitchFamily="2" charset="-78"/>
+                <a:ea typeface="Amiri" pitchFamily="2" charset="-78"/>
                 <a:cs typeface="Amiri" pitchFamily="2" charset="-78"/>
               </a:rPr>
               <a:t>م</a:t>
@@ -10098,6 +10172,7 @@
                   <a:srgbClr val="8A6D1E"/>
                 </a:solidFill>
                 <a:latin typeface="Amiri" pitchFamily="2" charset="-78"/>
+                <a:ea typeface="Amiri" pitchFamily="2" charset="-78"/>
                 <a:cs typeface="Amiri" pitchFamily="2" charset="-78"/>
               </a:rPr>
               <a:t>ب</a:t>
@@ -10162,6 +10237,7 @@
                   <a:srgbClr val="1B3B6F"/>
                 </a:solidFill>
                 <a:latin typeface="Amiri" pitchFamily="2" charset="-78"/>
+                <a:ea typeface="Amiri" pitchFamily="2" charset="-78"/>
                 <a:cs typeface="Amiri" pitchFamily="2" charset="-78"/>
               </a:rPr>
               <a:t>ب</a:t>
@@ -10213,6 +10289,7 @@
                   <a:srgbClr val="8A6D1E"/>
                 </a:solidFill>
                 <a:latin typeface="Amiri" pitchFamily="2" charset="-78"/>
+                <a:ea typeface="Amiri" pitchFamily="2" charset="-78"/>
                 <a:cs typeface="Amiri" pitchFamily="2" charset="-78"/>
               </a:rPr>
               <a:t>نَمُوذَجُ الإِجَابَةِ</a:t>
@@ -10326,6 +10403,7 @@
                   <a:srgbClr val="1F2A37"/>
                 </a:solidFill>
                 <a:latin typeface="Amiri" pitchFamily="2" charset="-78"/>
+                <a:ea typeface="Amiri" pitchFamily="2" charset="-78"/>
                 <a:cs typeface="Amiri" pitchFamily="2" charset="-78"/>
               </a:rPr>
               <a:t>تَتَسَابَقُ المَدَارِسُ اليَوْمَ لِتَزْوِيدِ فُصُولِهَا بِأَحْدَثِ الأَجْهِزَةِ، حَتَّى أَصْبَحَ الحَاسُوبُ اللَّوْحِيُّ فِي بَعْضِهَا أَهَمَّ مِنَ الكِتَابِ. فَهَلْ تُحَسِّنُ هٰذِهِ الأَجْهِزَةُ التَّعَلُّمَ حَقًّا، أَمْ أَنَّهَا مُجَرَّدُ مَظْهَرٍ حَدِيثٍ؟</a:t>
@@ -10345,6 +10423,7 @@
                   <a:srgbClr val="1F2A37"/>
                 </a:solidFill>
                 <a:latin typeface="Amiri" pitchFamily="2" charset="-78"/>
+                <a:ea typeface="Amiri" pitchFamily="2" charset="-78"/>
                 <a:cs typeface="Amiri" pitchFamily="2" charset="-78"/>
               </a:rPr>
               <a:t>مِنْ نَاحِيَةٍ، تَجْعَلُ التِّكْنُولُوجْيَا الدُّرُوسَ تَفَاعُلِيَّةً، وَتُتِيحُ لِكُلِّ طَالِبٍ أَنْ يَتَعَلَّمَ بِسُرْعَتِهِ الخَاصَّةِ، مِمَّا يُسَاعِدُ الضُّعَفَاءَ وَالمُتَفَوِّقِينَ مَعًا. وَمِنْ نَاحِيَةٍ أُخْرَى، تُشِيرُ دِرَاسَاتٌ حَدِيثَةٌ كَثِيرَةٌ إِلَى أَنَّ القِرَاءَةَ عَلَى الشَّاشَةِ أَقَلُّ تَرْكِيزًا مِنَ القِرَاءَةِ عَلَى الوَرَقِ، فَضْلًا عَنْ أَضْرَارِ الشَّاشَاتِ عَلَى العُيُونِ وَالنَّوْمِ.</a:t>
@@ -10364,6 +10443,7 @@
                   <a:srgbClr val="1F2A37"/>
                 </a:solidFill>
                 <a:latin typeface="Amiri" pitchFamily="2" charset="-78"/>
+                <a:ea typeface="Amiri" pitchFamily="2" charset="-78"/>
                 <a:cs typeface="Amiri" pitchFamily="2" charset="-78"/>
               </a:rPr>
               <a:t>وَقَدْ لَاحَظْتُ ذٰلِكَ فِي تَجْرِبَتِي؛ فَعِنْدَمَا حَصَلَ صَفُّنَا عَلَى حَوَاسِيبَ لَوْحِيَّةٍ فِي العَامِ المَاضِي، تَحَسَّنَتْ دَرَجَاتُنَا فِي الرِّيَاضِيَّاتِ بِفَضْلِ التَّطْبِيقَاتِ التَّفَاعُلِيَّةِ، بَيْنَمَا تَرَاجَعَ اهْتِمَامُ كَثِيرٍ مِنْ زُمَلَائِي بِقِرَاءَةِ الرِّوَايَاتِ، وَأَصْبَحُوا يَكْتَفُونَ بِالمُلَخَّصَاتِ القَصِيرَةِ.</a:t>
@@ -10383,6 +10463,7 @@
                   <a:srgbClr val="1F2A37"/>
                 </a:solidFill>
                 <a:latin typeface="Amiri" pitchFamily="2" charset="-78"/>
+                <a:ea typeface="Amiri" pitchFamily="2" charset="-78"/>
                 <a:cs typeface="Amiri" pitchFamily="2" charset="-78"/>
               </a:rPr>
               <a:t>صَحِيحٌ أَنَّ المُسْتَقْبَلَ رَقْمِيٌّ بِلَا شَكٍّ، غَيْرَ أَنَّ الجِهَازَ أَدَاةٌ، لَا مُعَلِّمٌ. وَإِذَا اسْتُخْدِمَتِ التِّكْنُولُوجْيَا بِتَوَازُنٍ وَتَحْتَ إِشْرَافِ مُعَلِّمِينَ مُدَرَّبِينَ، فَسَتُصْبِحُ الفُصُولُ أَمَاكِنَ يَتَعَلَّمُ فِيهَا الجَمِيعُ بِشَغَفٍ وَثِقَةٍ.</a:t>
@@ -10481,11 +10562,12 @@
               <a:buNone/>
             </a:pPr>
             <a:r>
-              <a:rPr lang="en-US" sz="950" b="1" dirty="0">
+              <a:rPr lang="ar-SA" sz="950" b="1" dirty="0">
                 <a:solidFill>
                   <a:srgbClr val="FFFFFF"/>
                 </a:solidFill>
                 <a:latin typeface="Calibri" pitchFamily="34" charset="0"/>
+                <a:ea typeface="Amiri" pitchFamily="2" charset="-78"/>
                 <a:cs typeface="Amiri" pitchFamily="2" charset="-78"/>
               </a:rPr>
               <a:t>أَمْ أَنَّهَا مُجَرَّدُ</a:t>
@@ -10546,11 +10628,12 @@
               <a:buNone/>
             </a:pPr>
             <a:r>
-              <a:rPr lang="en-US" sz="950" b="1" dirty="0">
+              <a:rPr lang="ar-SA" sz="950" b="1" dirty="0">
                 <a:solidFill>
                   <a:srgbClr val="FFFFFF"/>
                 </a:solidFill>
                 <a:latin typeface="Calibri" pitchFamily="34" charset="0"/>
+                <a:ea typeface="Amiri" pitchFamily="2" charset="-78"/>
                 <a:cs typeface="Amiri" pitchFamily="2" charset="-78"/>
               </a:rPr>
               <a:t>مِمَّا يُسَاعِدُ</a:t>
@@ -10611,11 +10694,12 @@
               <a:buNone/>
             </a:pPr>
             <a:r>
-              <a:rPr lang="en-US" sz="950" b="1" dirty="0">
+              <a:rPr lang="ar-SA" sz="950" b="1" dirty="0">
                 <a:solidFill>
                   <a:srgbClr val="FFFFFF"/>
                 </a:solidFill>
                 <a:latin typeface="Calibri" pitchFamily="34" charset="0"/>
+                <a:ea typeface="Amiri" pitchFamily="2" charset="-78"/>
                 <a:cs typeface="Amiri" pitchFamily="2" charset="-78"/>
               </a:rPr>
               <a:t>بَيْنَمَا تَرَاجَعَ</a:t>
@@ -10676,11 +10760,12 @@
               <a:buNone/>
             </a:pPr>
             <a:r>
-              <a:rPr lang="en-US" sz="950" b="1" dirty="0">
+              <a:rPr lang="ar-SA" sz="950" b="1" dirty="0">
                 <a:solidFill>
                   <a:srgbClr val="FFFFFF"/>
                 </a:solidFill>
                 <a:latin typeface="Calibri" pitchFamily="34" charset="0"/>
+                <a:ea typeface="Amiri" pitchFamily="2" charset="-78"/>
                 <a:cs typeface="Amiri" pitchFamily="2" charset="-78"/>
               </a:rPr>
               <a:t>إِذَا اسْتُخْدِمَتْ … فَسَتُصْبِحُ</a:t>
@@ -10814,6 +10899,7 @@
                   <a:srgbClr val="D4AF37"/>
                 </a:solidFill>
                 <a:latin typeface="Amiri" pitchFamily="2" charset="-78"/>
+                <a:ea typeface="Amiri" pitchFamily="2" charset="-78"/>
                 <a:cs typeface="Amiri" pitchFamily="2" charset="-78"/>
               </a:rPr>
               <a:t>م</a:t>
@@ -11134,6 +11220,7 @@
                   <a:srgbClr val="8A6D1E"/>
                 </a:solidFill>
                 <a:latin typeface="Amiri" pitchFamily="2" charset="-78"/>
+                <a:ea typeface="Amiri" pitchFamily="2" charset="-78"/>
                 <a:cs typeface="Amiri" pitchFamily="2" charset="-78"/>
               </a:rPr>
               <a:t>قَيِّمْ عَمَلَكَ</a:t>
@@ -12378,6 +12465,7 @@
                   <a:srgbClr val="FFFFFF"/>
                 </a:solidFill>
                 <a:latin typeface="Amiri" pitchFamily="2" charset="-78"/>
+                <a:ea typeface="Amiri" pitchFamily="2" charset="-78"/>
                 <a:cs typeface="Amiri" pitchFamily="2" charset="-78"/>
               </a:rPr>
               <a:t>أَحْسَنْتُمْ! إِلَى اللِّقَاءِ</a:t>
@@ -12530,6 +12618,7 @@
                   <a:srgbClr val="D4AF37"/>
                 </a:solidFill>
                 <a:latin typeface="Amiri" pitchFamily="2" charset="-78"/>
+                <a:ea typeface="Amiri" pitchFamily="2" charset="-78"/>
                 <a:cs typeface="Amiri" pitchFamily="2" charset="-78"/>
               </a:rPr>
               <a:t>وَرْشَةُ التَّدْرِيبِ</a:t>
@@ -12663,6 +12752,7 @@
                   <a:srgbClr val="D4AF37"/>
                 </a:solidFill>
                 <a:latin typeface="Amiri" pitchFamily="2" charset="-78"/>
+                <a:ea typeface="Amiri" pitchFamily="2" charset="-78"/>
                 <a:cs typeface="Amiri" pitchFamily="2" charset="-78"/>
               </a:rPr>
               <a:t>م</a:t>
@@ -12983,6 +13073,7 @@
                   <a:srgbClr val="8A6D1E"/>
                 </a:solidFill>
                 <a:latin typeface="Amiri" pitchFamily="2" charset="-78"/>
+                <a:ea typeface="Amiri" pitchFamily="2" charset="-78"/>
                 <a:cs typeface="Amiri" pitchFamily="2" charset="-78"/>
               </a:rPr>
               <a:t>آدَابُ الصَّفِّ</a:t>
@@ -14514,6 +14605,7 @@
                   <a:srgbClr val="D4AF37"/>
                 </a:solidFill>
                 <a:latin typeface="Amiri" pitchFamily="2" charset="-78"/>
+                <a:ea typeface="Amiri" pitchFamily="2" charset="-78"/>
                 <a:cs typeface="Amiri" pitchFamily="2" charset="-78"/>
               </a:rPr>
               <a:t>م</a:t>
@@ -14834,6 +14926,7 @@
                   <a:srgbClr val="8A6D1E"/>
                 </a:solidFill>
                 <a:latin typeface="Amiri" pitchFamily="2" charset="-78"/>
+                <a:ea typeface="Amiri" pitchFamily="2" charset="-78"/>
                 <a:cs typeface="Amiri" pitchFamily="2" charset="-78"/>
               </a:rPr>
               <a:t>خَرِيطَةُ الوَرْشَةِ</a:t>
@@ -15148,6 +15241,7 @@
                   <a:srgbClr val="1B3B6F"/>
                 </a:solidFill>
                 <a:latin typeface="Amiri" pitchFamily="2" charset="-78"/>
+                <a:ea typeface="Amiri" pitchFamily="2" charset="-78"/>
                 <a:cs typeface="Amiri" pitchFamily="2" charset="-78"/>
               </a:rPr>
               <a:t>كَيْفَ</a:t>
@@ -15424,6 +15518,7 @@
                   <a:srgbClr val="1E6B52"/>
                 </a:solidFill>
                 <a:latin typeface="Amiri" pitchFamily="2" charset="-78"/>
+                <a:ea typeface="Amiri" pitchFamily="2" charset="-78"/>
                 <a:cs typeface="Amiri" pitchFamily="2" charset="-78"/>
               </a:rPr>
               <a:t>الاسْتِمَارَةُ</a:t>
@@ -15700,6 +15795,7 @@
                   <a:srgbClr val="1E6B52"/>
                 </a:solidFill>
                 <a:latin typeface="Amiri" pitchFamily="2" charset="-78"/>
+                <a:ea typeface="Amiri" pitchFamily="2" charset="-78"/>
                 <a:cs typeface="Amiri" pitchFamily="2" charset="-78"/>
               </a:rPr>
               <a:t>الرِّسَالَةُ</a:t>
@@ -15976,6 +16072,7 @@
                   <a:srgbClr val="1E6B52"/>
                 </a:solidFill>
                 <a:latin typeface="Amiri" pitchFamily="2" charset="-78"/>
+                <a:ea typeface="Amiri" pitchFamily="2" charset="-78"/>
                 <a:cs typeface="Amiri" pitchFamily="2" charset="-78"/>
               </a:rPr>
               <a:t>المَقَالُ</a:t>
@@ -16252,6 +16349,7 @@
                   <a:srgbClr val="8A6D1E"/>
                 </a:solidFill>
                 <a:latin typeface="Amiri" pitchFamily="2" charset="-78"/>
+                <a:ea typeface="Amiri" pitchFamily="2" charset="-78"/>
                 <a:cs typeface="Amiri" pitchFamily="2" charset="-78"/>
               </a:rPr>
               <a:t>قَيِّمْ</a:t>
@@ -16495,6 +16593,7 @@
                   <a:srgbClr val="D4AF37"/>
                 </a:solidFill>
                 <a:latin typeface="Amiri" pitchFamily="2" charset="-78"/>
+                <a:ea typeface="Amiri" pitchFamily="2" charset="-78"/>
                 <a:cs typeface="Amiri" pitchFamily="2" charset="-78"/>
               </a:rPr>
               <a:t>م</a:t>
@@ -16815,6 +16914,7 @@
                   <a:srgbClr val="8A6D1E"/>
                 </a:solidFill>
                 <a:latin typeface="Amiri" pitchFamily="2" charset="-78"/>
+                <a:ea typeface="Amiri" pitchFamily="2" charset="-78"/>
                 <a:cs typeface="Amiri" pitchFamily="2" charset="-78"/>
               </a:rPr>
               <a:t>امْتِحَانُ الكِتَابَةِ</a:t>
@@ -17439,6 +17539,7 @@
                   <a:srgbClr val="1B3B6F"/>
                 </a:solidFill>
                 <a:latin typeface="Amiri" pitchFamily="2" charset="-78"/>
+                <a:ea typeface="Amiri" pitchFamily="2" charset="-78"/>
                 <a:cs typeface="Amiri" pitchFamily="2" charset="-78"/>
               </a:rPr>
               <a:t>سَبُّورَةٌ ذَكِيَّةٌ يَعْرِضُ عَلَيْهَا المُعَلِّمُ الأَفْلَامَ</a:t>
@@ -17538,6 +17639,7 @@
                   <a:srgbClr val="1B3B6F"/>
                 </a:solidFill>
                 <a:latin typeface="Amiri" pitchFamily="2" charset="-78"/>
+                <a:ea typeface="Amiri" pitchFamily="2" charset="-78"/>
                 <a:cs typeface="Amiri" pitchFamily="2" charset="-78"/>
               </a:rPr>
               <a:t>الحَوَاسِيبُ اللَّوْحِيَّةُ الَّتِي اسْتَخْدَمْنَاهَا أَمْسِ</a:t>
@@ -17637,6 +17739,7 @@
                   <a:srgbClr val="1B3B6F"/>
                 </a:solidFill>
                 <a:latin typeface="Amiri" pitchFamily="2" charset="-78"/>
+                <a:ea typeface="Amiri" pitchFamily="2" charset="-78"/>
                 <a:cs typeface="Amiri" pitchFamily="2" charset="-78"/>
               </a:rPr>
               <a:t>هٰذَا الفَصْلُ أَفْضَلُ مِنْ فَصْلِي القَدِيمِ</a:t>
@@ -17808,6 +17911,7 @@
                   <a:srgbClr val="D4AF37"/>
                 </a:solidFill>
                 <a:latin typeface="Amiri" pitchFamily="2" charset="-78"/>
+                <a:ea typeface="Amiri" pitchFamily="2" charset="-78"/>
                 <a:cs typeface="Amiri" pitchFamily="2" charset="-78"/>
               </a:rPr>
               <a:t>م</a:t>
@@ -18128,6 +18232,7 @@
                   <a:srgbClr val="8A6D1E"/>
                 </a:solidFill>
                 <a:latin typeface="Amiri" pitchFamily="2" charset="-78"/>
+                <a:ea typeface="Amiri" pitchFamily="2" charset="-78"/>
                 <a:cs typeface="Amiri" pitchFamily="2" charset="-78"/>
               </a:rPr>
               <a:t>اسْتِمَارَةُ اسْتِعَارَةِ جِهَازٍ</a:t>
@@ -18484,6 +18589,7 @@
                   <a:srgbClr val="1B3B6F"/>
                 </a:solidFill>
                 <a:latin typeface="Amiri" pitchFamily="2" charset="-78"/>
+                <a:ea typeface="Amiri" pitchFamily="2" charset="-78"/>
                 <a:cs typeface="Amiri" pitchFamily="2" charset="-78"/>
               </a:rPr>
               <a:t>الاسْمُ</a:t>
@@ -18728,6 +18834,7 @@
                   <a:srgbClr val="1B3B6F"/>
                 </a:solidFill>
                 <a:latin typeface="Amiri" pitchFamily="2" charset="-78"/>
+                <a:ea typeface="Amiri" pitchFamily="2" charset="-78"/>
                 <a:cs typeface="Amiri" pitchFamily="2" charset="-78"/>
               </a:rPr>
               <a:t>الصَّفُّ</a:t>
@@ -18972,6 +19079,7 @@
                   <a:srgbClr val="1B3B6F"/>
                 </a:solidFill>
                 <a:latin typeface="Amiri" pitchFamily="2" charset="-78"/>
+                <a:ea typeface="Amiri" pitchFamily="2" charset="-78"/>
                 <a:cs typeface="Amiri" pitchFamily="2" charset="-78"/>
               </a:rPr>
               <a:t>الجِهَازُ المَطْلُوبُ</a:t>
@@ -19216,6 +19324,7 @@
                   <a:srgbClr val="1B3B6F"/>
                 </a:solidFill>
                 <a:latin typeface="Amiri" pitchFamily="2" charset="-78"/>
+                <a:ea typeface="Amiri" pitchFamily="2" charset="-78"/>
                 <a:cs typeface="Amiri" pitchFamily="2" charset="-78"/>
               </a:rPr>
               <a:t>المَادَّةُ</a:t>
@@ -19460,6 +19569,7 @@
                   <a:srgbClr val="1B3B6F"/>
                 </a:solidFill>
                 <a:latin typeface="Amiri" pitchFamily="2" charset="-78"/>
+                <a:ea typeface="Amiri" pitchFamily="2" charset="-78"/>
                 <a:cs typeface="Amiri" pitchFamily="2" charset="-78"/>
               </a:rPr>
               <a:t>تَارِيخُ الاسْتِعَارَةِ</a:t>
@@ -19704,6 +19814,7 @@
                   <a:srgbClr val="1B3B6F"/>
                 </a:solidFill>
                 <a:latin typeface="Amiri" pitchFamily="2" charset="-78"/>
+                <a:ea typeface="Amiri" pitchFamily="2" charset="-78"/>
                 <a:cs typeface="Amiri" pitchFamily="2" charset="-78"/>
               </a:rPr>
               <a:t>تَارِيخُ الإِرْجَاعِ</a:t>
@@ -19948,6 +20059,7 @@
                   <a:srgbClr val="1B3B6F"/>
                 </a:solidFill>
                 <a:latin typeface="Amiri" pitchFamily="2" charset="-78"/>
+                <a:ea typeface="Amiri" pitchFamily="2" charset="-78"/>
                 <a:cs typeface="Amiri" pitchFamily="2" charset="-78"/>
               </a:rPr>
               <a:t>أَدَوَاتٌ إِضَافِيَّةٌ</a:t>
@@ -20127,6 +20239,7 @@
                   <a:srgbClr val="1B3B6F"/>
                 </a:solidFill>
                 <a:latin typeface="Amiri" pitchFamily="2" charset="-78"/>
+                <a:ea typeface="Amiri" pitchFamily="2" charset="-78"/>
                 <a:cs typeface="Amiri" pitchFamily="2" charset="-78"/>
               </a:rPr>
               <a:t>جُمْلَةٌ: لِمَاذَا تَحْتَاجُ إِلَى الجِهَازِ؟</a:t>
@@ -20336,6 +20449,7 @@
                   <a:srgbClr val="D4AF37"/>
                 </a:solidFill>
                 <a:latin typeface="Amiri" pitchFamily="2" charset="-78"/>
+                <a:ea typeface="Amiri" pitchFamily="2" charset="-78"/>
                 <a:cs typeface="Amiri" pitchFamily="2" charset="-78"/>
               </a:rPr>
               <a:t>م</a:t>
@@ -20656,6 +20770,7 @@
                   <a:srgbClr val="8A6D1E"/>
                 </a:solidFill>
                 <a:latin typeface="Amiri" pitchFamily="2" charset="-78"/>
+                <a:ea typeface="Amiri" pitchFamily="2" charset="-78"/>
                 <a:cs typeface="Amiri" pitchFamily="2" charset="-78"/>
               </a:rPr>
               <a:t>نَمُوذَجُ الإِجَابَةِ</a:t>
@@ -20974,6 +21089,7 @@
                   <a:srgbClr val="1B3B6F"/>
                 </a:solidFill>
                 <a:latin typeface="Amiri" pitchFamily="2" charset="-78"/>
+                <a:ea typeface="Amiri" pitchFamily="2" charset="-78"/>
                 <a:cs typeface="Amiri" pitchFamily="2" charset="-78"/>
               </a:rPr>
               <a:t>نُورَةُ سَعِيدٌ</a:t>
@@ -21012,6 +21128,7 @@
                   <a:srgbClr val="1B3B6F"/>
                 </a:solidFill>
                 <a:latin typeface="Amiri" pitchFamily="2" charset="-78"/>
+                <a:ea typeface="Amiri" pitchFamily="2" charset="-78"/>
                 <a:cs typeface="Amiri" pitchFamily="2" charset="-78"/>
               </a:rPr>
               <a:t>الاسْمُ</a:t>
@@ -21153,6 +21270,7 @@
                   <a:srgbClr val="1B3B6F"/>
                 </a:solidFill>
                 <a:latin typeface="Amiri" pitchFamily="2" charset="-78"/>
+                <a:ea typeface="Amiri" pitchFamily="2" charset="-78"/>
                 <a:cs typeface="Amiri" pitchFamily="2" charset="-78"/>
               </a:rPr>
               <a:t>العَاشِرُ (ب)</a:t>
@@ -21191,6 +21309,7 @@
                   <a:srgbClr val="1B3B6F"/>
                 </a:solidFill>
                 <a:latin typeface="Amiri" pitchFamily="2" charset="-78"/>
+                <a:ea typeface="Amiri" pitchFamily="2" charset="-78"/>
                 <a:cs typeface="Amiri" pitchFamily="2" charset="-78"/>
               </a:rPr>
               <a:t>الصَّفُّ</a:t>
@@ -21332,6 +21451,7 @@
                   <a:srgbClr val="1B3B6F"/>
                 </a:solidFill>
                 <a:latin typeface="Amiri" pitchFamily="2" charset="-78"/>
+                <a:ea typeface="Amiri" pitchFamily="2" charset="-78"/>
                 <a:cs typeface="Amiri" pitchFamily="2" charset="-78"/>
               </a:rPr>
               <a:t>حَاسُوبٌ لَوْحِيٌّ</a:t>
@@ -21370,6 +21490,7 @@
                   <a:srgbClr val="1B3B6F"/>
                 </a:solidFill>
                 <a:latin typeface="Amiri" pitchFamily="2" charset="-78"/>
+                <a:ea typeface="Amiri" pitchFamily="2" charset="-78"/>
                 <a:cs typeface="Amiri" pitchFamily="2" charset="-78"/>
               </a:rPr>
               <a:t>الجِهَازُ المَطْلُوبُ</a:t>
@@ -21511,6 +21632,7 @@
                   <a:srgbClr val="1B3B6F"/>
                 </a:solidFill>
                 <a:latin typeface="Amiri" pitchFamily="2" charset="-78"/>
+                <a:ea typeface="Amiri" pitchFamily="2" charset="-78"/>
                 <a:cs typeface="Amiri" pitchFamily="2" charset="-78"/>
               </a:rPr>
               <a:t>الجُغْرَافْيَا</a:t>
@@ -21549,6 +21671,7 @@
                   <a:srgbClr val="1B3B6F"/>
                 </a:solidFill>
                 <a:latin typeface="Amiri" pitchFamily="2" charset="-78"/>
+                <a:ea typeface="Amiri" pitchFamily="2" charset="-78"/>
                 <a:cs typeface="Amiri" pitchFamily="2" charset="-78"/>
               </a:rPr>
               <a:t>المَادَّةُ</a:t>
@@ -21690,6 +21813,7 @@
                   <a:srgbClr val="1B3B6F"/>
                 </a:solidFill>
                 <a:latin typeface="Amiri" pitchFamily="2" charset="-78"/>
+                <a:ea typeface="Amiri" pitchFamily="2" charset="-78"/>
                 <a:cs typeface="Amiri" pitchFamily="2" charset="-78"/>
               </a:rPr>
               <a:t>١٠ أُكْتُوبَر</a:t>
@@ -21728,6 +21852,7 @@
                   <a:srgbClr val="1B3B6F"/>
                 </a:solidFill>
                 <a:latin typeface="Amiri" pitchFamily="2" charset="-78"/>
+                <a:ea typeface="Amiri" pitchFamily="2" charset="-78"/>
                 <a:cs typeface="Amiri" pitchFamily="2" charset="-78"/>
               </a:rPr>
               <a:t>تَارِيخُ الاسْتِعَارَةِ</a:t>
@@ -21869,6 +21994,7 @@
                   <a:srgbClr val="1B3B6F"/>
                 </a:solidFill>
                 <a:latin typeface="Amiri" pitchFamily="2" charset="-78"/>
+                <a:ea typeface="Amiri" pitchFamily="2" charset="-78"/>
                 <a:cs typeface="Amiri" pitchFamily="2" charset="-78"/>
               </a:rPr>
               <a:t>١٧ أُكْتُوبَر</a:t>
@@ -21907,6 +22033,7 @@
                   <a:srgbClr val="1B3B6F"/>
                 </a:solidFill>
                 <a:latin typeface="Amiri" pitchFamily="2" charset="-78"/>
+                <a:ea typeface="Amiri" pitchFamily="2" charset="-78"/>
                 <a:cs typeface="Amiri" pitchFamily="2" charset="-78"/>
               </a:rPr>
               <a:t>تَارِيخُ الإِرْجَاعِ</a:t>
@@ -22048,6 +22175,7 @@
                   <a:srgbClr val="1B3B6F"/>
                 </a:solidFill>
                 <a:latin typeface="Amiri" pitchFamily="2" charset="-78"/>
+                <a:ea typeface="Amiri" pitchFamily="2" charset="-78"/>
                 <a:cs typeface="Amiri" pitchFamily="2" charset="-78"/>
               </a:rPr>
               <a:t>سَمَّاعَاتٌ وَشَاحِنٌ</a:t>
@@ -22086,6 +22214,7 @@
                   <a:srgbClr val="1B3B6F"/>
                 </a:solidFill>
                 <a:latin typeface="Amiri" pitchFamily="2" charset="-78"/>
+                <a:ea typeface="Amiri" pitchFamily="2" charset="-78"/>
                 <a:cs typeface="Amiri" pitchFamily="2" charset="-78"/>
               </a:rPr>
               <a:t>أَدَوَاتٌ إِضَافِيَّةٌ</a:t>
@@ -22227,6 +22356,7 @@
                   <a:srgbClr val="1B3B6F"/>
                 </a:solidFill>
                 <a:latin typeface="Amiri" pitchFamily="2" charset="-78"/>
+                <a:ea typeface="Amiri" pitchFamily="2" charset="-78"/>
                 <a:cs typeface="Amiri" pitchFamily="2" charset="-78"/>
               </a:rPr>
               <a:t>أَحْتَاجُ إِلَيْهِ لِمَشْرُوعٍ يَطْلُبُ مِنَّا أَنْ نُصَمِّمَ خَرِيطَةً تَفَاعُلِيَّةً.</a:t>
@@ -22265,6 +22395,7 @@
                   <a:srgbClr val="1B3B6F"/>
                 </a:solidFill>
                 <a:latin typeface="Amiri" pitchFamily="2" charset="-78"/>
+                <a:ea typeface="Amiri" pitchFamily="2" charset="-78"/>
                 <a:cs typeface="Amiri" pitchFamily="2" charset="-78"/>
               </a:rPr>
               <a:t>جُمْلَةٌ: لِمَاذَا تَحْتَاجُ إِلَى الجِهَازِ؟</a:t>
@@ -22474,6 +22605,7 @@
                   <a:srgbClr val="D4AF37"/>
                 </a:solidFill>
                 <a:latin typeface="Amiri" pitchFamily="2" charset="-78"/>
+                <a:ea typeface="Amiri" pitchFamily="2" charset="-78"/>
                 <a:cs typeface="Amiri" pitchFamily="2" charset="-78"/>
               </a:rPr>
               <a:t>م</a:t>
@@ -22794,6 +22926,7 @@
                   <a:srgbClr val="8A6D1E"/>
                 </a:solidFill>
                 <a:latin typeface="Amiri" pitchFamily="2" charset="-78"/>
+                <a:ea typeface="Amiri" pitchFamily="2" charset="-78"/>
                 <a:cs typeface="Amiri" pitchFamily="2" charset="-78"/>
               </a:rPr>
               <a:t>فَصْلِي الجَدِيدُ</a:t>
@@ -23269,6 +23402,7 @@
                   <a:srgbClr val="1B3B6F"/>
                 </a:solidFill>
                 <a:latin typeface="Amiri" pitchFamily="2" charset="-78"/>
+                <a:ea typeface="Amiri" pitchFamily="2" charset="-78"/>
                 <a:cs typeface="Amiri" pitchFamily="2" charset="-78"/>
               </a:rPr>
               <a:t>فِيهِ تُوجَدُ … وَيُوجَدُ …</a:t>
@@ -23345,6 +23479,7 @@
                   <a:srgbClr val="1B3B6F"/>
                 </a:solidFill>
                 <a:latin typeface="Amiri" pitchFamily="2" charset="-78"/>
+                <a:ea typeface="Amiri" pitchFamily="2" charset="-78"/>
                 <a:cs typeface="Amiri" pitchFamily="2" charset="-78"/>
               </a:rPr>
               <a:t>أَمْسِ اسْتَخْدَمْنَا … فِي حِصَّةِ …</a:t>
@@ -23421,6 +23556,7 @@
                   <a:srgbClr val="1B3B6F"/>
                 </a:solidFill>
                 <a:latin typeface="Amiri" pitchFamily="2" charset="-78"/>
+                <a:ea typeface="Amiri" pitchFamily="2" charset="-78"/>
                 <a:cs typeface="Amiri" pitchFamily="2" charset="-78"/>
               </a:rPr>
               <a:t>الهَوَاتِفُ مَمْنُوعَةٌ، وَيَجِبُ أَنْ …</a:t>
@@ -23497,6 +23633,7 @@
                   <a:srgbClr val="1B3B6F"/>
                 </a:solidFill>
                 <a:latin typeface="Amiri" pitchFamily="2" charset="-78"/>
+                <a:ea typeface="Amiri" pitchFamily="2" charset="-78"/>
                 <a:cs typeface="Amiri" pitchFamily="2" charset="-78"/>
               </a:rPr>
               <a:t>فِي الأُسْبُوعِ القَادِمِ سَنَزْرَعُ …</a:t>
@@ -23668,6 +23805,7 @@
                   <a:srgbClr val="D4AF37"/>
                 </a:solidFill>
                 <a:latin typeface="Amiri" pitchFamily="2" charset="-78"/>
+                <a:ea typeface="Amiri" pitchFamily="2" charset="-78"/>
                 <a:cs typeface="Amiri" pitchFamily="2" charset="-78"/>
               </a:rPr>
               <a:t>م</a:t>
@@ -23988,6 +24126,7 @@
                   <a:srgbClr val="8A6D1E"/>
                 </a:solidFill>
                 <a:latin typeface="Amiri" pitchFamily="2" charset="-78"/>
+                <a:ea typeface="Amiri" pitchFamily="2" charset="-78"/>
                 <a:cs typeface="Amiri" pitchFamily="2" charset="-78"/>
               </a:rPr>
               <a:t>نَصُّ السُّؤَالِ</a:t>
@@ -24268,6 +24407,7 @@
                   <a:srgbClr val="1B3B6F"/>
                 </a:solidFill>
                 <a:latin typeface="Amiri" pitchFamily="2" charset="-78"/>
+                <a:ea typeface="Amiri" pitchFamily="2" charset="-78"/>
                 <a:cs typeface="Amiri" pitchFamily="2" charset="-78"/>
               </a:rPr>
               <a:t>صِفِي فَصْلَكِ الجَدِيدَ لِصَدِيقَتِكِ فِي رِسَالَةٍ (٨٠–٩٠ كَلِمَةً).</a:t>
@@ -24409,6 +24549,7 @@
                   <a:srgbClr val="1B3B6F"/>
                 </a:solidFill>
                 <a:latin typeface="Amiri" pitchFamily="2" charset="-78"/>
+                <a:ea typeface="Amiri" pitchFamily="2" charset="-78"/>
                 <a:cs typeface="Amiri" pitchFamily="2" charset="-78"/>
               </a:rPr>
               <a:t>كَيْفَ الفَصْلُ؟ وَمَاذَا يُوجَدُ فِيهِ؟</a:t>
@@ -24550,6 +24691,7 @@
                   <a:srgbClr val="1B3B6F"/>
                 </a:solidFill>
                 <a:latin typeface="Amiri" pitchFamily="2" charset="-78"/>
+                <a:ea typeface="Amiri" pitchFamily="2" charset="-78"/>
                 <a:cs typeface="Amiri" pitchFamily="2" charset="-78"/>
               </a:rPr>
               <a:t>صِفِي دَرْسًا اسْتَخْدَمْتِ فِيهِ أَدَاةً لِلتَّعَلُّمِ.</a:t>
@@ -24691,6 +24833,7 @@
                   <a:srgbClr val="1B3B6F"/>
                 </a:solidFill>
                 <a:latin typeface="Amiri" pitchFamily="2" charset="-78"/>
+                <a:ea typeface="Amiri" pitchFamily="2" charset="-78"/>
                 <a:cs typeface="Amiri" pitchFamily="2" charset="-78"/>
               </a:rPr>
               <a:t>مَا القَوَاعِدُ؟ وَمَا رَأْيُكِ؟</a:t>
@@ -24832,6 +24975,7 @@
                   <a:srgbClr val="1B3B6F"/>
                 </a:solidFill>
                 <a:latin typeface="Amiri" pitchFamily="2" charset="-78"/>
+                <a:ea typeface="Amiri" pitchFamily="2" charset="-78"/>
                 <a:cs typeface="Amiri" pitchFamily="2" charset="-78"/>
               </a:rPr>
               <a:t>مَاذَا سَتَفْعَلُونَ فِي الفَصْلِ الأُسْبُوعَ القَادِمَ؟</a:t>
@@ -25041,6 +25185,7 @@
                   <a:srgbClr val="D4AF37"/>
                 </a:solidFill>
                 <a:latin typeface="Amiri" pitchFamily="2" charset="-78"/>
+                <a:ea typeface="Amiri" pitchFamily="2" charset="-78"/>
                 <a:cs typeface="Amiri" pitchFamily="2" charset="-78"/>
               </a:rPr>
               <a:t>م</a:t>
@@ -25361,6 +25506,7 @@
                   <a:srgbClr val="8A6D1E"/>
                 </a:solidFill>
                 <a:latin typeface="Amiri" pitchFamily="2" charset="-78"/>
+                <a:ea typeface="Amiri" pitchFamily="2" charset="-78"/>
                 <a:cs typeface="Amiri" pitchFamily="2" charset="-78"/>
               </a:rPr>
               <a:t>قَوَالِبُ الكِتَابَةِ</a:t>
@@ -25641,6 +25787,7 @@
                   <a:srgbClr val="1B3B6F"/>
                 </a:solidFill>
                 <a:latin typeface="Amiri" pitchFamily="2" charset="-78"/>
+                <a:ea typeface="Amiri" pitchFamily="2" charset="-78"/>
                 <a:cs typeface="Amiri" pitchFamily="2" charset="-78"/>
               </a:rPr>
               <a:t>مَرْحَبًا يَا ______ ، كَيْفَ حَالُكِ؟</a:t>
@@ -25847,6 +25994,7 @@
                   <a:srgbClr val="1B3B6F"/>
                 </a:solidFill>
                 <a:latin typeface="Amiri" pitchFamily="2" charset="-78"/>
+                <a:ea typeface="Amiri" pitchFamily="2" charset="-78"/>
                 <a:cs typeface="Amiri" pitchFamily="2" charset="-78"/>
               </a:rPr>
               <a:t>فَصْلِي الجَدِيدُ ______ . فِيهِ تُوجَدُ ______ ، وَيُوجَدُ ______ .</a:t>
@@ -26053,6 +26201,7 @@
                   <a:srgbClr val="1B3B6F"/>
                 </a:solidFill>
                 <a:latin typeface="Amiri" pitchFamily="2" charset="-78"/>
+                <a:ea typeface="Amiri" pitchFamily="2" charset="-78"/>
                 <a:cs typeface="Amiri" pitchFamily="2" charset="-78"/>
               </a:rPr>
               <a:t>أَمْسِ اسْتَخْدَمْنَا ______ فِي حِصَّةِ ______ ، وَكَانَ الدَّرْسُ ______ .</a:t>
@@ -26259,6 +26408,7 @@
                   <a:srgbClr val="1B3B6F"/>
                 </a:solidFill>
                 <a:latin typeface="Amiri" pitchFamily="2" charset="-78"/>
+                <a:ea typeface="Amiri" pitchFamily="2" charset="-78"/>
                 <a:cs typeface="Amiri" pitchFamily="2" charset="-78"/>
               </a:rPr>
               <a:t>الهَوَاتِفُ مَمْنُوعَةٌ، وَيَجِبُ أَنْ ______ . فِي رَأْيِي ______ .</a:t>
@@ -26465,6 +26615,7 @@
                   <a:srgbClr val="1B3B6F"/>
                 </a:solidFill>
                 <a:latin typeface="Amiri" pitchFamily="2" charset="-78"/>
+                <a:ea typeface="Amiri" pitchFamily="2" charset="-78"/>
                 <a:cs typeface="Amiri" pitchFamily="2" charset="-78"/>
               </a:rPr>
               <a:t>فِي الأُسْبُوعِ القَادِمِ سَنَزْرَعُ / سَنَصْنَعُ ______ .</a:t>
@@ -26671,6 +26822,7 @@
                   <a:srgbClr val="1B3B6F"/>
                 </a:solidFill>
                 <a:latin typeface="Amiri" pitchFamily="2" charset="-78"/>
+                <a:ea typeface="Amiri" pitchFamily="2" charset="-78"/>
                 <a:cs typeface="Amiri" pitchFamily="2" charset="-78"/>
               </a:rPr>
               <a:t>مَعَ السَّلَامَةِ، ______</a:t>
@@ -26910,13 +27062,9 @@
     <a:fontScheme name="Office">
       <a:majorFont>
         <a:latin typeface="Calibri Light" panose="020F0302020204030204"/>
-        <a:ea typeface=""/>
-        <a:cs typeface=""/>
-        <a:font script="Jpan" typeface="游ゴシック Light"/>
-        <a:font script="Hang" typeface="맑은 고딕"/>
-        <a:font script="Hans" typeface="等线 Light"/>
-        <a:font script="Hant" typeface="新細明體"/>
-        <a:font script="Arab" typeface="Times New Roman"/>
+        <a:ea typeface="Amiri" pitchFamily="2" charset="-78"/>
+        <a:cs typeface="Amiri" pitchFamily="2" charset="-78"/>
+        <a:font script="Arab" typeface="Amiri"/>
         <a:font script="Hebr" typeface="Times New Roman"/>
         <a:font script="Thai" typeface="Angsana New"/>
         <a:font script="Ethi" typeface="Nyala"/>
@@ -26962,13 +27110,9 @@
       </a:majorFont>
       <a:minorFont>
         <a:latin typeface="Calibri" panose="020F0502020204030204"/>
-        <a:ea typeface=""/>
-        <a:cs typeface=""/>
-        <a:font script="Jpan" typeface="游ゴシック"/>
-        <a:font script="Hang" typeface="맑은 고딕"/>
-        <a:font script="Hans" typeface="等线"/>
-        <a:font script="Hant" typeface="新細明體"/>
-        <a:font script="Arab" typeface="Arial"/>
+        <a:ea typeface="Amiri" pitchFamily="2" charset="-78"/>
+        <a:cs typeface="Amiri" pitchFamily="2" charset="-78"/>
+        <a:font script="Arab" typeface="Amiri"/>
         <a:font script="Hebr" typeface="Arial"/>
         <a:font script="Thai" typeface="Cordia New"/>
         <a:font script="Ethi" typeface="Nyala"/>

--- a/Topic_D/Exam_Practice/TD-L02_Writing_Workshop_The_Classroom_and_Learning_Tools.pptx
+++ b/Topic_D/Exam_Practice/TD-L02_Writing_Workshop_The_Classroom_and_Learning_Tools.pptx
@@ -3848,7 +3848,7 @@
                 <a:solidFill>
                   <a:srgbClr val="FFFFFF"/>
                 </a:solidFill>
-                <a:latin typeface="Calibri" pitchFamily="34" charset="0"/>
+                <a:latin typeface="Amiri" pitchFamily="2" charset="-78"/>
                 <a:ea typeface="Amiri" pitchFamily="2" charset="-78"/>
                 <a:cs typeface="Amiri" pitchFamily="2" charset="-78"/>
               </a:rPr>
@@ -3914,7 +3914,7 @@
                 <a:solidFill>
                   <a:srgbClr val="FFFFFF"/>
                 </a:solidFill>
-                <a:latin typeface="Calibri" pitchFamily="34" charset="0"/>
+                <a:latin typeface="Amiri" pitchFamily="2" charset="-78"/>
                 <a:ea typeface="Amiri" pitchFamily="2" charset="-78"/>
                 <a:cs typeface="Amiri" pitchFamily="2" charset="-78"/>
               </a:rPr>
@@ -3980,7 +3980,7 @@
                 <a:solidFill>
                   <a:srgbClr val="FFFFFF"/>
                 </a:solidFill>
-                <a:latin typeface="Calibri" pitchFamily="34" charset="0"/>
+                <a:latin typeface="Amiri" pitchFamily="2" charset="-78"/>
                 <a:ea typeface="Amiri" pitchFamily="2" charset="-78"/>
                 <a:cs typeface="Amiri" pitchFamily="2" charset="-78"/>
               </a:rPr>
@@ -4046,7 +4046,7 @@
                 <a:solidFill>
                   <a:srgbClr val="FFFFFF"/>
                 </a:solidFill>
-                <a:latin typeface="Calibri" pitchFamily="34" charset="0"/>
+                <a:latin typeface="Amiri" pitchFamily="2" charset="-78"/>
                 <a:ea typeface="Amiri" pitchFamily="2" charset="-78"/>
                 <a:cs typeface="Amiri" pitchFamily="2" charset="-78"/>
               </a:rPr>
@@ -4844,7 +4844,7 @@
                 <a:solidFill>
                   <a:srgbClr val="FFFFFF"/>
                 </a:solidFill>
-                <a:latin typeface="Calibri" pitchFamily="34" charset="0"/>
+                <a:latin typeface="Amiri" pitchFamily="2" charset="-78"/>
                 <a:ea typeface="Amiri" pitchFamily="2" charset="-78"/>
                 <a:cs typeface="Amiri" pitchFamily="2" charset="-78"/>
               </a:rPr>
@@ -4910,7 +4910,7 @@
                 <a:solidFill>
                   <a:srgbClr val="FFFFFF"/>
                 </a:solidFill>
-                <a:latin typeface="Calibri" pitchFamily="34" charset="0"/>
+                <a:latin typeface="Amiri" pitchFamily="2" charset="-78"/>
                 <a:ea typeface="Amiri" pitchFamily="2" charset="-78"/>
                 <a:cs typeface="Amiri" pitchFamily="2" charset="-78"/>
               </a:rPr>
@@ -4976,7 +4976,7 @@
                 <a:solidFill>
                   <a:srgbClr val="FFFFFF"/>
                 </a:solidFill>
-                <a:latin typeface="Calibri" pitchFamily="34" charset="0"/>
+                <a:latin typeface="Amiri" pitchFamily="2" charset="-78"/>
                 <a:ea typeface="Amiri" pitchFamily="2" charset="-78"/>
                 <a:cs typeface="Amiri" pitchFamily="2" charset="-78"/>
               </a:rPr>
@@ -5042,7 +5042,7 @@
                 <a:solidFill>
                   <a:srgbClr val="FFFFFF"/>
                 </a:solidFill>
-                <a:latin typeface="Calibri" pitchFamily="34" charset="0"/>
+                <a:latin typeface="Amiri" pitchFamily="2" charset="-78"/>
                 <a:ea typeface="Amiri" pitchFamily="2" charset="-78"/>
                 <a:cs typeface="Amiri" pitchFamily="2" charset="-78"/>
               </a:rPr>
@@ -8596,7 +8596,7 @@
                 <a:solidFill>
                   <a:srgbClr val="FFFFFF"/>
                 </a:solidFill>
-                <a:latin typeface="Calibri" pitchFamily="34" charset="0"/>
+                <a:latin typeface="Amiri" pitchFamily="2" charset="-78"/>
                 <a:ea typeface="Amiri" pitchFamily="2" charset="-78"/>
                 <a:cs typeface="Amiri" pitchFamily="2" charset="-78"/>
               </a:rPr>
@@ -8662,7 +8662,7 @@
                 <a:solidFill>
                   <a:srgbClr val="FFFFFF"/>
                 </a:solidFill>
-                <a:latin typeface="Calibri" pitchFamily="34" charset="0"/>
+                <a:latin typeface="Amiri" pitchFamily="2" charset="-78"/>
                 <a:ea typeface="Amiri" pitchFamily="2" charset="-78"/>
                 <a:cs typeface="Amiri" pitchFamily="2" charset="-78"/>
               </a:rPr>
@@ -8728,7 +8728,7 @@
                 <a:solidFill>
                   <a:srgbClr val="FFFFFF"/>
                 </a:solidFill>
-                <a:latin typeface="Calibri" pitchFamily="34" charset="0"/>
+                <a:latin typeface="Amiri" pitchFamily="2" charset="-78"/>
                 <a:ea typeface="Amiri" pitchFamily="2" charset="-78"/>
                 <a:cs typeface="Amiri" pitchFamily="2" charset="-78"/>
               </a:rPr>
@@ -8794,7 +8794,7 @@
                 <a:solidFill>
                   <a:srgbClr val="FFFFFF"/>
                 </a:solidFill>
-                <a:latin typeface="Calibri" pitchFamily="34" charset="0"/>
+                <a:latin typeface="Amiri" pitchFamily="2" charset="-78"/>
                 <a:ea typeface="Amiri" pitchFamily="2" charset="-78"/>
                 <a:cs typeface="Amiri" pitchFamily="2" charset="-78"/>
               </a:rPr>
@@ -9581,7 +9581,7 @@
                 <a:solidFill>
                   <a:srgbClr val="FFFFFF"/>
                 </a:solidFill>
-                <a:latin typeface="Calibri" pitchFamily="34" charset="0"/>
+                <a:latin typeface="Amiri" pitchFamily="2" charset="-78"/>
                 <a:ea typeface="Amiri" pitchFamily="2" charset="-78"/>
                 <a:cs typeface="Amiri" pitchFamily="2" charset="-78"/>
               </a:rPr>
@@ -9647,7 +9647,7 @@
                 <a:solidFill>
                   <a:srgbClr val="FFFFFF"/>
                 </a:solidFill>
-                <a:latin typeface="Calibri" pitchFamily="34" charset="0"/>
+                <a:latin typeface="Amiri" pitchFamily="2" charset="-78"/>
                 <a:ea typeface="Amiri" pitchFamily="2" charset="-78"/>
                 <a:cs typeface="Amiri" pitchFamily="2" charset="-78"/>
               </a:rPr>
@@ -9713,7 +9713,7 @@
                 <a:solidFill>
                   <a:srgbClr val="FFFFFF"/>
                 </a:solidFill>
-                <a:latin typeface="Calibri" pitchFamily="34" charset="0"/>
+                <a:latin typeface="Amiri" pitchFamily="2" charset="-78"/>
                 <a:ea typeface="Amiri" pitchFamily="2" charset="-78"/>
                 <a:cs typeface="Amiri" pitchFamily="2" charset="-78"/>
               </a:rPr>
@@ -9779,7 +9779,7 @@
                 <a:solidFill>
                   <a:srgbClr val="FFFFFF"/>
                 </a:solidFill>
-                <a:latin typeface="Calibri" pitchFamily="34" charset="0"/>
+                <a:latin typeface="Amiri" pitchFamily="2" charset="-78"/>
                 <a:ea typeface="Amiri" pitchFamily="2" charset="-78"/>
                 <a:cs typeface="Amiri" pitchFamily="2" charset="-78"/>
               </a:rPr>
@@ -10566,7 +10566,7 @@
                 <a:solidFill>
                   <a:srgbClr val="FFFFFF"/>
                 </a:solidFill>
-                <a:latin typeface="Calibri" pitchFamily="34" charset="0"/>
+                <a:latin typeface="Amiri" pitchFamily="2" charset="-78"/>
                 <a:ea typeface="Amiri" pitchFamily="2" charset="-78"/>
                 <a:cs typeface="Amiri" pitchFamily="2" charset="-78"/>
               </a:rPr>
@@ -10632,7 +10632,7 @@
                 <a:solidFill>
                   <a:srgbClr val="FFFFFF"/>
                 </a:solidFill>
-                <a:latin typeface="Calibri" pitchFamily="34" charset="0"/>
+                <a:latin typeface="Amiri" pitchFamily="2" charset="-78"/>
                 <a:ea typeface="Amiri" pitchFamily="2" charset="-78"/>
                 <a:cs typeface="Amiri" pitchFamily="2" charset="-78"/>
               </a:rPr>
@@ -10698,7 +10698,7 @@
                 <a:solidFill>
                   <a:srgbClr val="FFFFFF"/>
                 </a:solidFill>
-                <a:latin typeface="Calibri" pitchFamily="34" charset="0"/>
+                <a:latin typeface="Amiri" pitchFamily="2" charset="-78"/>
                 <a:ea typeface="Amiri" pitchFamily="2" charset="-78"/>
                 <a:cs typeface="Amiri" pitchFamily="2" charset="-78"/>
               </a:rPr>
@@ -10764,7 +10764,7 @@
                 <a:solidFill>
                   <a:srgbClr val="FFFFFF"/>
                 </a:solidFill>
-                <a:latin typeface="Calibri" pitchFamily="34" charset="0"/>
+                <a:latin typeface="Amiri" pitchFamily="2" charset="-78"/>
                 <a:ea typeface="Amiri" pitchFamily="2" charset="-78"/>
                 <a:cs typeface="Amiri" pitchFamily="2" charset="-78"/>
               </a:rPr>
